--- a/刘志彪_产业经济学_第11章_产业结构及其变动(产业控制力主线精编).pptx
+++ b/刘志彪_产业经济学_第11章_产业结构及其变动(产业控制力主线精编).pptx
@@ -8864,22 +8864,7 @@
               </a:spcAft>
             </a:pPr>
             <a:r>
-              <a:rPr b="1" sz="1250">
-                <a:solidFill>
-                  <a:srgbClr val="1E293B"/>
-                </a:solidFill>
-                <a:latin typeface="微软雅黑"/>
-              </a:rPr>
-              <a:t>公式定义：</a:t>
-            </a:r>
-            <a:r>
-              <a:rPr sz="1250">
-                <a:solidFill>
-                  <a:srgbClr val="1E293B"/>
-                </a:solidFill>
-                <a:latin typeface="宋体"/>
-              </a:rPr>
-              <a:t>K = sum |S_{i, t} - S_{i, t-1}|。</a:t>
+              <a:t>公式定义：K = sum |S(i, t) - S(i, t-1)|。</a:t>
             </a:r>
           </a:p>
           <a:p>
